--- a/fixtures/sample-vector-pdf-paints.pptx
+++ b/fixtures/sample-vector-pdf-paints.pptx
@@ -9,6 +9,7 @@
     <p:sldId id="257" r:id="rId3"/>
     <p:sldId id="258" r:id="rId4"/>
     <p:sldId id="259" r:id="rId5"/>
+    <p:sldId id="260" r:id="rId6"/>
   </p:sldIdLst>
   <p:sldSz cx="6096000" cy="3429000"/>
   <p:notesSz cx="6858000" cy="9144000"/>
@@ -494,6 +495,71 @@
           <a:lstStyle/>
           <a:p>
             <a:endParaRPr/>
+          </a:p>
+        </p:txBody>
+      </p:sp>
+    </p:spTree>
+  </p:cSld>
+  <p:clrMapOvr>
+    <a:masterClrMapping/>
+  </p:clrMapOvr>
+</p:sld>
+</file>
+
+<file path=ppt/slides/slide5.xml><?xml version="1.0" encoding="utf-8"?>
+<p:sld xmlns:a="http://schemas.openxmlformats.org/drawingml/2006/main" xmlns:r="http://schemas.openxmlformats.org/officeDocument/2006/relationships" xmlns:p="http://schemas.openxmlformats.org/presentationml/2006/main">
+  <p:cSld>
+    <p:spTree>
+      <p:nvGrpSpPr>
+        <p:cNvPr id="1" name=""/>
+        <p:cNvGrpSpPr/>
+        <p:nvPr/>
+      </p:nvGrpSpPr>
+      <p:grpSpPr>
+        <a:xfrm>
+          <a:off x="0" y="0"/>
+          <a:ext cx="0" cy="0"/>
+          <a:chOff x="0" y="0"/>
+          <a:chExt cx="0" cy="0"/>
+        </a:xfrm>
+      </p:grpSpPr>
+      <p:sp>
+        <p:nvSpPr>
+          <p:cNvPr id="900" name="gradientText"/>
+          <p:cNvSpPr/>
+          <p:nvPr/>
+        </p:nvSpPr>
+        <p:spPr>
+          <a:xfrm>
+            <a:off x="381000" y="381000"/>
+            <a:ext cx="2857500" cy="762000"/>
+          </a:xfrm>
+          <a:prstGeom prst="rect">
+            <a:avLst/>
+          </a:prstGeom>
+          <a:noFill/>
+        </p:spPr>
+        <p:txBody>
+          <a:bodyPr anchor="ctr"/>
+          <a:lstStyle/>
+          <a:p>
+            <a:r>
+              <a:rPr sz="3200">
+                <a:gradFill>
+                  <a:gsLst>
+                    <a:gs pos="0">
+                      <a:srgbClr val="FF0000"/>
+                    </a:gs>
+                    <a:gs pos="100000">
+                      <a:srgbClr val="0000FF"/>
+                    </a:gs>
+                  </a:gsLst>
+                  <a:lin ang="0"/>
+                </a:gradFill>
+                <a:latin typeface="WebPPT Glyph Latin"/>
+              </a:rPr>
+              <a:t>AB</a:t>
+            </a:r>
           </a:p>
         </p:txBody>
       </p:sp>

--- a/fixtures/sample-vector-pdf-paints.pptx
+++ b/fixtures/sample-vector-pdf-paints.pptx
@@ -10,6 +10,7 @@
     <p:sldId id="258" r:id="rId4"/>
     <p:sldId id="259" r:id="rId5"/>
     <p:sldId id="260" r:id="rId6"/>
+    <p:sldId id="261" r:id="rId7"/>
   </p:sldIdLst>
   <p:sldSz cx="6096000" cy="3429000"/>
   <p:notesSz cx="6858000" cy="9144000"/>
@@ -559,6 +560,111 @@
                 <a:latin typeface="WebPPT Glyph Latin"/>
               </a:rPr>
               <a:t>AB</a:t>
+            </a:r>
+          </a:p>
+        </p:txBody>
+      </p:sp>
+    </p:spTree>
+  </p:cSld>
+  <p:clrMapOvr>
+    <a:masterClrMapping/>
+  </p:clrMapOvr>
+</p:sld>
+</file>
+
+<file path=ppt/slides/slide6.xml><?xml version="1.0" encoding="utf-8"?>
+<p:sld xmlns:a="http://schemas.openxmlformats.org/drawingml/2006/main" xmlns:r="http://schemas.openxmlformats.org/officeDocument/2006/relationships" xmlns:p="http://schemas.openxmlformats.org/presentationml/2006/main">
+  <p:cSld>
+    <p:spTree>
+      <p:nvGrpSpPr>
+        <p:cNvPr id="1" name=""/>
+        <p:cNvGrpSpPr/>
+        <p:nvPr/>
+      </p:nvGrpSpPr>
+      <p:grpSpPr>
+        <a:xfrm>
+          <a:off x="0" y="0"/>
+          <a:ext cx="0" cy="0"/>
+          <a:chOff x="0" y="0"/>
+          <a:chExt cx="0" cy="0"/>
+        </a:xfrm>
+      </p:grpSpPr>
+      <p:sp>
+        <p:nvSpPr>
+          <p:cNvPr id="901" name="verticalText"/>
+          <p:cNvSpPr/>
+          <p:nvPr/>
+        </p:nvSpPr>
+        <p:spPr>
+          <a:xfrm>
+            <a:off x="381000" y="381000"/>
+            <a:ext cx="2667000" cy="762000"/>
+          </a:xfrm>
+          <a:prstGeom prst="rect">
+            <a:avLst/>
+          </a:prstGeom>
+          <a:noFill/>
+        </p:spPr>
+        <p:txBody>
+          <a:bodyPr anchor="ctr"/>
+          <a:lstStyle/>
+          <a:p>
+            <a:r>
+              <a:rPr sz="3200">
+                <a:gradFill>
+                  <a:gsLst>
+                    <a:gs pos="0">
+                      <a:srgbClr val="FF0000"/>
+                    </a:gs>
+                    <a:gs pos="100000">
+                      <a:srgbClr val="0000FF"/>
+                    </a:gs>
+                  </a:gsLst>
+                  <a:lin ang="5400000"/>
+                </a:gradFill>
+                <a:latin typeface="WebPPT Glyph Latin"/>
+              </a:rPr>
+              <a:t>bq</a:t>
+            </a:r>
+          </a:p>
+        </p:txBody>
+      </p:sp>
+      <p:sp>
+        <p:nvSpPr>
+          <p:cNvPr id="902" name="diagonalText"/>
+          <p:cNvSpPr/>
+          <p:nvPr/>
+        </p:nvSpPr>
+        <p:spPr>
+          <a:xfrm>
+            <a:off x="3238500" y="381000"/>
+            <a:ext cx="2667000" cy="762000"/>
+          </a:xfrm>
+          <a:prstGeom prst="rect">
+            <a:avLst/>
+          </a:prstGeom>
+          <a:noFill/>
+        </p:spPr>
+        <p:txBody>
+          <a:bodyPr anchor="ctr"/>
+          <a:lstStyle/>
+          <a:p>
+            <a:r>
+              <a:rPr sz="3200">
+                <a:gradFill>
+                  <a:gsLst>
+                    <a:gs pos="0">
+                      <a:srgbClr val="FF0000"/>
+                    </a:gs>
+                    <a:gs pos="100000">
+                      <a:srgbClr val="0000FF"/>
+                    </a:gs>
+                  </a:gsLst>
+                  <a:lin ang="2700000"/>
+                </a:gradFill>
+                <a:latin typeface="WebPPT Glyph Latin"/>
+              </a:rPr>
+              <a:t>io</a:t>
             </a:r>
           </a:p>
         </p:txBody>

--- a/fixtures/sample-vector-pdf-paints.pptx
+++ b/fixtures/sample-vector-pdf-paints.pptx
@@ -11,6 +11,7 @@
     <p:sldId id="259" r:id="rId5"/>
     <p:sldId id="260" r:id="rId6"/>
     <p:sldId id="261" r:id="rId7"/>
+    <p:sldId id="262" r:id="rId8"/>
   </p:sldIdLst>
   <p:sldSz cx="6096000" cy="3429000"/>
   <p:notesSz cx="6858000" cy="9144000"/>
@@ -665,6 +666,88 @@
                 <a:latin typeface="WebPPT Glyph Latin"/>
               </a:rPr>
               <a:t>io</a:t>
+            </a:r>
+          </a:p>
+        </p:txBody>
+      </p:sp>
+    </p:spTree>
+  </p:cSld>
+  <p:clrMapOvr>
+    <a:masterClrMapping/>
+  </p:clrMapOvr>
+</p:sld>
+</file>
+
+<file path=ppt/slides/slide7.xml><?xml version="1.0" encoding="utf-8"?>
+<p:sld xmlns:a="http://schemas.openxmlformats.org/drawingml/2006/main" xmlns:r="http://schemas.openxmlformats.org/officeDocument/2006/relationships" xmlns:p="http://schemas.openxmlformats.org/presentationml/2006/main">
+  <p:cSld>
+    <p:spTree>
+      <p:nvGrpSpPr>
+        <p:cNvPr id="1" name=""/>
+        <p:cNvGrpSpPr/>
+        <p:nvPr/>
+      </p:nvGrpSpPr>
+      <p:grpSpPr>
+        <a:xfrm>
+          <a:off x="0" y="0"/>
+          <a:ext cx="0" cy="0"/>
+          <a:chOff x="0" y="0"/>
+          <a:chExt cx="0" cy="0"/>
+        </a:xfrm>
+      </p:grpSpPr>
+      <p:sp>
+        <p:nvSpPr>
+          <p:cNvPr id="903" name="multiGradientText"/>
+          <p:cNvSpPr/>
+          <p:nvPr/>
+        </p:nvSpPr>
+        <p:spPr>
+          <a:xfrm>
+            <a:off x="381000" y="381000"/>
+            <a:ext cx="2857500" cy="762000"/>
+          </a:xfrm>
+          <a:prstGeom prst="rect">
+            <a:avLst/>
+          </a:prstGeom>
+          <a:noFill/>
+        </p:spPr>
+        <p:txBody>
+          <a:bodyPr anchor="ctr"/>
+          <a:lstStyle/>
+          <a:p>
+            <a:r>
+              <a:rPr sz="3200">
+                <a:gradFill>
+                  <a:gsLst>
+                    <a:gs pos="0">
+                      <a:srgbClr val="FF0000"/>
+                    </a:gs>
+                    <a:gs pos="100000">
+                      <a:srgbClr val="0000FF"/>
+                    </a:gs>
+                  </a:gsLst>
+                  <a:lin ang="0"/>
+                </a:gradFill>
+                <a:latin typeface="WebPPT Glyph Latin"/>
+              </a:rPr>
+              <a:t>Ab</a:t>
+            </a:r>
+            <a:r>
+              <a:rPr sz="3200">
+                <a:gradFill>
+                  <a:gsLst>
+                    <a:gs pos="0">
+                      <a:srgbClr val="0000FF"/>
+                    </a:gs>
+                    <a:gs pos="100000">
+                      <a:srgbClr val="FF0000"/>
+                    </a:gs>
+                  </a:gsLst>
+                  <a:lin ang="0"/>
+                </a:gradFill>
+                <a:latin typeface="WebPPT Glyph Latin"/>
+              </a:rPr>
+              <a:t>01</a:t>
             </a:r>
           </a:p>
         </p:txBody>

--- a/fixtures/sample-vector-pdf-paints.pptx
+++ b/fixtures/sample-vector-pdf-paints.pptx
@@ -12,6 +12,7 @@
     <p:sldId id="260" r:id="rId6"/>
     <p:sldId id="261" r:id="rId7"/>
     <p:sldId id="262" r:id="rId8"/>
+    <p:sldId id="263" r:id="rId9"/>
   </p:sldIdLst>
   <p:sldSz cx="6096000" cy="3429000"/>
   <p:notesSz cx="6858000" cy="9144000"/>
@@ -748,6 +749,72 @@
                 <a:latin typeface="WebPPT Glyph Latin"/>
               </a:rPr>
               <a:t>01</a:t>
+            </a:r>
+          </a:p>
+        </p:txBody>
+      </p:sp>
+    </p:spTree>
+  </p:cSld>
+  <p:clrMapOvr>
+    <a:masterClrMapping/>
+  </p:clrMapOvr>
+</p:sld>
+</file>
+
+<file path=ppt/slides/slide8.xml><?xml version="1.0" encoding="utf-8"?>
+<p:sld xmlns:a="http://schemas.openxmlformats.org/drawingml/2006/main" xmlns:r="http://schemas.openxmlformats.org/officeDocument/2006/relationships" xmlns:p="http://schemas.openxmlformats.org/presentationml/2006/main">
+  <p:cSld>
+    <p:spTree>
+      <p:nvGrpSpPr>
+        <p:cNvPr id="1" name=""/>
+        <p:cNvGrpSpPr/>
+        <p:nvPr/>
+      </p:nvGrpSpPr>
+      <p:grpSpPr>
+        <a:xfrm>
+          <a:off x="0" y="0"/>
+          <a:ext cx="0" cy="0"/>
+          <a:chOff x="0" y="0"/>
+          <a:chExt cx="0" cy="0"/>
+        </a:xfrm>
+      </p:grpSpPr>
+      <p:sp>
+        <p:nvSpPr>
+          <p:cNvPr id="904" name="underlinedGradient"/>
+          <p:cNvSpPr/>
+          <p:nvPr/>
+        </p:nvSpPr>
+        <p:spPr>
+          <a:xfrm>
+            <a:off x="381000" y="381000"/>
+            <a:ext cx="2857500" cy="762000"/>
+          </a:xfrm>
+          <a:prstGeom prst="rect">
+            <a:avLst/>
+          </a:prstGeom>
+          <a:noFill/>
+        </p:spPr>
+        <p:txBody>
+          <a:bodyPr anchor="ctr"/>
+          <a:lstStyle/>
+          <a:p>
+            <a:r>
+              <a:rPr sz="3200">
+                <a:gradFill>
+                  <a:gsLst>
+                    <a:gs pos="0">
+                      <a:srgbClr val="FF0000"/>
+                    </a:gs>
+                    <a:gs pos="100000">
+                      <a:srgbClr val="0000FF"/>
+                    </a:gs>
+                  </a:gsLst>
+                  <a:lin ang="0"/>
+                </a:gradFill>
+                <a:u val="sng"/>
+                <a:latin typeface="WebPPT Glyph Latin"/>
+              </a:rPr>
+              <a:t>Ab</a:t>
             </a:r>
           </a:p>
         </p:txBody>
